--- a/Presentations/AVR Live Class 7.pptx
+++ b/Presentations/AVR Live Class 7.pptx
@@ -292,493 +292,29 @@
 </p:presentation>
 </file>
 
-<file path=ppt/revisionInfo.xml><?xml version="1.0" encoding="utf-8"?>
-<p1510:revInfo xmlns:a="http://schemas.openxmlformats.org/drawingml/2006/main" xmlns:r="http://schemas.openxmlformats.org/officeDocument/2006/relationships" xmlns:p1510="http://schemas.microsoft.com/office/powerpoint/2015/10/main">
-  <p1510:revLst>
-    <p1510:client id="{F461F90B-DCA3-49F7-84B0-A5E851497A69}" v="36" dt="2025-09-19T09:29:56.665"/>
-  </p1510:revLst>
-</p1510:revInfo>
-</file>
-
 <file path=ppt/changesInfos/changesInfo1.xml><?xml version="1.0" encoding="utf-8"?>
 <pc:chgInfo xmlns:a="http://schemas.openxmlformats.org/drawingml/2006/main" xmlns:r="http://schemas.openxmlformats.org/officeDocument/2006/relationships" xmlns:ac="http://schemas.microsoft.com/office/drawing/2013/main/command" xmlns:pc="http://schemas.microsoft.com/office/powerpoint/2013/main/command">
   <pc:docChgLst>
     <pc:chgData name="Sreejith Rajan" userId="ec11bca0e4bee75f" providerId="LiveId" clId="{7B4F392D-EAB3-4CE7-903E-F84869825F47}"/>
     <pc:docChg chg="undo custSel addSld delSld modSld sldOrd">
-      <pc:chgData name="Sreejith Rajan" userId="ec11bca0e4bee75f" providerId="LiveId" clId="{7B4F392D-EAB3-4CE7-903E-F84869825F47}" dt="2025-09-19T09:32:23.899" v="1768" actId="20577"/>
+      <pc:chgData name="Sreejith Rajan" userId="ec11bca0e4bee75f" providerId="LiveId" clId="{7B4F392D-EAB3-4CE7-903E-F84869825F47}" dt="2025-11-27T15:12:57.160" v="1776" actId="20577"/>
       <pc:docMkLst>
         <pc:docMk/>
       </pc:docMkLst>
-      <pc:sldChg chg="modSp mod">
-        <pc:chgData name="Sreejith Rajan" userId="ec11bca0e4bee75f" providerId="LiveId" clId="{7B4F392D-EAB3-4CE7-903E-F84869825F47}" dt="2025-09-19T08:03:14.191" v="11" actId="20577"/>
-        <pc:sldMkLst>
-          <pc:docMk/>
-          <pc:sldMk cId="0" sldId="256"/>
-        </pc:sldMkLst>
-        <pc:spChg chg="mod">
-          <ac:chgData name="Sreejith Rajan" userId="ec11bca0e4bee75f" providerId="LiveId" clId="{7B4F392D-EAB3-4CE7-903E-F84869825F47}" dt="2025-09-19T08:03:14.191" v="11" actId="20577"/>
-          <ac:spMkLst>
-            <pc:docMk/>
-            <pc:sldMk cId="0" sldId="256"/>
-            <ac:spMk id="33" creationId="{00000000-0000-0000-0000-000000000000}"/>
-          </ac:spMkLst>
-        </pc:spChg>
-      </pc:sldChg>
-      <pc:sldChg chg="addSp modSp mod">
-        <pc:chgData name="Sreejith Rajan" userId="ec11bca0e4bee75f" providerId="LiveId" clId="{7B4F392D-EAB3-4CE7-903E-F84869825F47}" dt="2025-09-19T09:07:13.860" v="1004" actId="20577"/>
-        <pc:sldMkLst>
-          <pc:docMk/>
-          <pc:sldMk cId="0" sldId="258"/>
-        </pc:sldMkLst>
-        <pc:spChg chg="mod">
-          <ac:chgData name="Sreejith Rajan" userId="ec11bca0e4bee75f" providerId="LiveId" clId="{7B4F392D-EAB3-4CE7-903E-F84869825F47}" dt="2025-09-19T09:07:13.860" v="1004" actId="20577"/>
-          <ac:spMkLst>
-            <pc:docMk/>
-            <pc:sldMk cId="0" sldId="258"/>
-            <ac:spMk id="46" creationId="{00000000-0000-0000-0000-000000000000}"/>
-          </ac:spMkLst>
-        </pc:spChg>
-        <pc:spChg chg="mod">
-          <ac:chgData name="Sreejith Rajan" userId="ec11bca0e4bee75f" providerId="LiveId" clId="{7B4F392D-EAB3-4CE7-903E-F84869825F47}" dt="2025-09-19T08:08:01.437" v="98" actId="5793"/>
-          <ac:spMkLst>
-            <pc:docMk/>
-            <pc:sldMk cId="0" sldId="258"/>
-            <ac:spMk id="47" creationId="{00000000-0000-0000-0000-000000000000}"/>
-          </ac:spMkLst>
-        </pc:spChg>
-        <pc:picChg chg="add mod">
-          <ac:chgData name="Sreejith Rajan" userId="ec11bca0e4bee75f" providerId="LiveId" clId="{7B4F392D-EAB3-4CE7-903E-F84869825F47}" dt="2025-09-19T08:08:21.806" v="102" actId="1076"/>
-          <ac:picMkLst>
-            <pc:docMk/>
-            <pc:sldMk cId="0" sldId="258"/>
-            <ac:picMk id="2" creationId="{36F74B4C-E0C7-DF56-73A9-85DF4FA43836}"/>
-          </ac:picMkLst>
-        </pc:picChg>
-      </pc:sldChg>
-      <pc:sldChg chg="addSp delSp modSp add del mod ord">
-        <pc:chgData name="Sreejith Rajan" userId="ec11bca0e4bee75f" providerId="LiveId" clId="{7B4F392D-EAB3-4CE7-903E-F84869825F47}" dt="2025-09-19T09:26:16.160" v="1561" actId="20577"/>
-        <pc:sldMkLst>
-          <pc:docMk/>
-          <pc:sldMk cId="1389626550" sldId="267"/>
-        </pc:sldMkLst>
-        <pc:spChg chg="add mod">
-          <ac:chgData name="Sreejith Rajan" userId="ec11bca0e4bee75f" providerId="LiveId" clId="{7B4F392D-EAB3-4CE7-903E-F84869825F47}" dt="2025-09-19T09:26:16.160" v="1561" actId="20577"/>
-          <ac:spMkLst>
-            <pc:docMk/>
-            <pc:sldMk cId="1389626550" sldId="267"/>
-            <ac:spMk id="2" creationId="{0A45312C-625C-D860-C976-5B390A0AC3A8}"/>
-          </ac:spMkLst>
-        </pc:spChg>
-        <pc:spChg chg="mod">
-          <ac:chgData name="Sreejith Rajan" userId="ec11bca0e4bee75f" providerId="LiveId" clId="{7B4F392D-EAB3-4CE7-903E-F84869825F47}" dt="2025-09-19T08:16:56.179" v="349" actId="20577"/>
-          <ac:spMkLst>
-            <pc:docMk/>
-            <pc:sldMk cId="1389626550" sldId="267"/>
-            <ac:spMk id="8" creationId="{6C9CC41F-9FD7-9D53-4AC5-97DFC8CE4F6C}"/>
-          </ac:spMkLst>
-        </pc:spChg>
-        <pc:spChg chg="mod">
-          <ac:chgData name="Sreejith Rajan" userId="ec11bca0e4bee75f" providerId="LiveId" clId="{7B4F392D-EAB3-4CE7-903E-F84869825F47}" dt="2025-09-19T08:12:02.061" v="148" actId="20577"/>
-          <ac:spMkLst>
-            <pc:docMk/>
-            <pc:sldMk cId="1389626550" sldId="267"/>
-            <ac:spMk id="54" creationId="{505CB07C-62A7-0E4C-6035-03E85C6DF01E}"/>
-          </ac:spMkLst>
-        </pc:spChg>
-        <pc:picChg chg="del">
-          <ac:chgData name="Sreejith Rajan" userId="ec11bca0e4bee75f" providerId="LiveId" clId="{7B4F392D-EAB3-4CE7-903E-F84869825F47}" dt="2025-09-19T08:12:04.534" v="149" actId="478"/>
-          <ac:picMkLst>
-            <pc:docMk/>
-            <pc:sldMk cId="1389626550" sldId="267"/>
-            <ac:picMk id="4" creationId="{C49C1DF3-C6D7-3FBE-C7BE-60CD0077F615}"/>
-          </ac:picMkLst>
-        </pc:picChg>
-      </pc:sldChg>
-      <pc:sldChg chg="delSp modSp mod">
-        <pc:chgData name="Sreejith Rajan" userId="ec11bca0e4bee75f" providerId="LiveId" clId="{7B4F392D-EAB3-4CE7-903E-F84869825F47}" dt="2025-09-19T09:14:19.017" v="1107" actId="27636"/>
-        <pc:sldMkLst>
-          <pc:docMk/>
-          <pc:sldMk cId="2517281589" sldId="274"/>
-        </pc:sldMkLst>
-        <pc:spChg chg="mod">
-          <ac:chgData name="Sreejith Rajan" userId="ec11bca0e4bee75f" providerId="LiveId" clId="{7B4F392D-EAB3-4CE7-903E-F84869825F47}" dt="2025-09-19T09:14:19.017" v="1107" actId="27636"/>
-          <ac:spMkLst>
-            <pc:docMk/>
-            <pc:sldMk cId="2517281589" sldId="274"/>
-            <ac:spMk id="54" creationId="{F5C408E8-BC47-B2C2-7462-C129AFFB4F4F}"/>
-          </ac:spMkLst>
-        </pc:spChg>
-        <pc:spChg chg="del mod">
-          <ac:chgData name="Sreejith Rajan" userId="ec11bca0e4bee75f" providerId="LiveId" clId="{7B4F392D-EAB3-4CE7-903E-F84869825F47}" dt="2025-09-19T09:14:06.574" v="1073" actId="478"/>
-          <ac:spMkLst>
-            <pc:docMk/>
-            <pc:sldMk cId="2517281589" sldId="274"/>
-            <ac:spMk id="55" creationId="{FEA6C22F-5ADF-DBE8-82A3-850A9E39DB91}"/>
-          </ac:spMkLst>
-        </pc:spChg>
-      </pc:sldChg>
-      <pc:sldChg chg="modSp mod ord">
-        <pc:chgData name="Sreejith Rajan" userId="ec11bca0e4bee75f" providerId="LiveId" clId="{7B4F392D-EAB3-4CE7-903E-F84869825F47}" dt="2025-09-19T09:15:14.299" v="1109" actId="5793"/>
-        <pc:sldMkLst>
-          <pc:docMk/>
-          <pc:sldMk cId="682396941" sldId="282"/>
-        </pc:sldMkLst>
-        <pc:spChg chg="mod">
-          <ac:chgData name="Sreejith Rajan" userId="ec11bca0e4bee75f" providerId="LiveId" clId="{7B4F392D-EAB3-4CE7-903E-F84869825F47}" dt="2025-09-19T09:15:14.299" v="1109" actId="5793"/>
-          <ac:spMkLst>
-            <pc:docMk/>
-            <pc:sldMk cId="682396941" sldId="282"/>
-            <ac:spMk id="55" creationId="{CDBEBA7C-FD1D-B57A-1E7D-B25370E3E214}"/>
-          </ac:spMkLst>
-        </pc:spChg>
-        <pc:picChg chg="mod">
-          <ac:chgData name="Sreejith Rajan" userId="ec11bca0e4bee75f" providerId="LiveId" clId="{7B4F392D-EAB3-4CE7-903E-F84869825F47}" dt="2025-09-19T09:06:59.517" v="1003" actId="1076"/>
-          <ac:picMkLst>
-            <pc:docMk/>
-            <pc:sldMk cId="682396941" sldId="282"/>
-            <ac:picMk id="6" creationId="{475F8FF4-FAFB-9274-50A5-C9C0753EA1BE}"/>
-          </ac:picMkLst>
-        </pc:picChg>
-      </pc:sldChg>
-      <pc:sldChg chg="addSp modSp mod ord">
-        <pc:chgData name="Sreejith Rajan" userId="ec11bca0e4bee75f" providerId="LiveId" clId="{7B4F392D-EAB3-4CE7-903E-F84869825F47}" dt="2025-09-19T08:49:57.054" v="704" actId="1076"/>
-        <pc:sldMkLst>
-          <pc:docMk/>
-          <pc:sldMk cId="3362503428" sldId="283"/>
-        </pc:sldMkLst>
-        <pc:spChg chg="add mod">
-          <ac:chgData name="Sreejith Rajan" userId="ec11bca0e4bee75f" providerId="LiveId" clId="{7B4F392D-EAB3-4CE7-903E-F84869825F47}" dt="2025-09-19T08:47:09.265" v="651" actId="113"/>
-          <ac:spMkLst>
-            <pc:docMk/>
-            <pc:sldMk cId="3362503428" sldId="283"/>
-            <ac:spMk id="9" creationId="{8098130A-5A5C-D029-15B2-D4DF6EF905FC}"/>
-          </ac:spMkLst>
-        </pc:spChg>
-        <pc:spChg chg="mod">
-          <ac:chgData name="Sreejith Rajan" userId="ec11bca0e4bee75f" providerId="LiveId" clId="{7B4F392D-EAB3-4CE7-903E-F84869825F47}" dt="2025-09-19T08:41:06.177" v="547" actId="20577"/>
-          <ac:spMkLst>
-            <pc:docMk/>
-            <pc:sldMk cId="3362503428" sldId="283"/>
-            <ac:spMk id="54" creationId="{165450FA-9AB0-DAAA-8787-5819DF6E52EE}"/>
-          </ac:spMkLst>
-        </pc:spChg>
-        <pc:picChg chg="mod modCrop">
-          <ac:chgData name="Sreejith Rajan" userId="ec11bca0e4bee75f" providerId="LiveId" clId="{7B4F392D-EAB3-4CE7-903E-F84869825F47}" dt="2025-09-19T08:41:13.129" v="549" actId="1076"/>
-          <ac:picMkLst>
-            <pc:docMk/>
-            <pc:sldMk cId="3362503428" sldId="283"/>
-            <ac:picMk id="3" creationId="{F7648779-8BF8-78D3-9138-28544F501A87}"/>
-          </ac:picMkLst>
-        </pc:picChg>
-        <pc:picChg chg="add mod modCrop">
-          <ac:chgData name="Sreejith Rajan" userId="ec11bca0e4bee75f" providerId="LiveId" clId="{7B4F392D-EAB3-4CE7-903E-F84869825F47}" dt="2025-09-19T08:49:57.054" v="704" actId="1076"/>
-          <ac:picMkLst>
-            <pc:docMk/>
-            <pc:sldMk cId="3362503428" sldId="283"/>
-            <ac:picMk id="4" creationId="{43AD386F-7DC7-0085-2793-2C6547FC3F91}"/>
-          </ac:picMkLst>
-        </pc:picChg>
-      </pc:sldChg>
-      <pc:sldChg chg="addSp delSp modSp mod">
-        <pc:chgData name="Sreejith Rajan" userId="ec11bca0e4bee75f" providerId="LiveId" clId="{7B4F392D-EAB3-4CE7-903E-F84869825F47}" dt="2025-09-19T08:46:05.396" v="573" actId="1076"/>
-        <pc:sldMkLst>
-          <pc:docMk/>
-          <pc:sldMk cId="2771709912" sldId="285"/>
-        </pc:sldMkLst>
-        <pc:spChg chg="add del mod">
-          <ac:chgData name="Sreejith Rajan" userId="ec11bca0e4bee75f" providerId="LiveId" clId="{7B4F392D-EAB3-4CE7-903E-F84869825F47}" dt="2025-09-19T08:46:00.499" v="571" actId="478"/>
-          <ac:spMkLst>
-            <pc:docMk/>
-            <pc:sldMk cId="2771709912" sldId="285"/>
-            <ac:spMk id="5" creationId="{89311C01-E8AF-B275-66BD-F31B3DD9AF06}"/>
-          </ac:spMkLst>
-        </pc:spChg>
-        <pc:spChg chg="mod">
-          <ac:chgData name="Sreejith Rajan" userId="ec11bca0e4bee75f" providerId="LiveId" clId="{7B4F392D-EAB3-4CE7-903E-F84869825F47}" dt="2025-09-19T08:45:44.582" v="570" actId="20577"/>
-          <ac:spMkLst>
-            <pc:docMk/>
-            <pc:sldMk cId="2771709912" sldId="285"/>
-            <ac:spMk id="46" creationId="{AD0C9125-2529-87A6-A821-EF0157BECEF2}"/>
-          </ac:spMkLst>
-        </pc:spChg>
-        <pc:spChg chg="mod">
-          <ac:chgData name="Sreejith Rajan" userId="ec11bca0e4bee75f" providerId="LiveId" clId="{7B4F392D-EAB3-4CE7-903E-F84869825F47}" dt="2025-09-19T08:08:27.299" v="103" actId="20577"/>
-          <ac:spMkLst>
-            <pc:docMk/>
-            <pc:sldMk cId="2771709912" sldId="285"/>
-            <ac:spMk id="47" creationId="{E974ABAE-A1E9-5AF4-4F05-9A6B3B72156A}"/>
-          </ac:spMkLst>
-        </pc:spChg>
-        <pc:picChg chg="add del mod modCrop">
-          <ac:chgData name="Sreejith Rajan" userId="ec11bca0e4bee75f" providerId="LiveId" clId="{7B4F392D-EAB3-4CE7-903E-F84869825F47}" dt="2025-09-19T08:46:02.739" v="572" actId="478"/>
-          <ac:picMkLst>
-            <pc:docMk/>
-            <pc:sldMk cId="2771709912" sldId="285"/>
-            <ac:picMk id="2" creationId="{35507460-38C9-3FE8-61E8-C68F86AFC6D6}"/>
-          </ac:picMkLst>
-        </pc:picChg>
-        <pc:picChg chg="add mod">
-          <ac:chgData name="Sreejith Rajan" userId="ec11bca0e4bee75f" providerId="LiveId" clId="{7B4F392D-EAB3-4CE7-903E-F84869825F47}" dt="2025-09-19T08:46:05.396" v="573" actId="1076"/>
-          <ac:picMkLst>
-            <pc:docMk/>
-            <pc:sldMk cId="2771709912" sldId="285"/>
-            <ac:picMk id="4" creationId="{24A15A76-7B21-037E-1031-980EB6A2BB21}"/>
-          </ac:picMkLst>
-        </pc:picChg>
-      </pc:sldChg>
-      <pc:sldChg chg="delSp del mod">
-        <pc:chgData name="Sreejith Rajan" userId="ec11bca0e4bee75f" providerId="LiveId" clId="{7B4F392D-EAB3-4CE7-903E-F84869825F47}" dt="2025-09-19T08:54:52.742" v="755" actId="47"/>
-        <pc:sldMkLst>
-          <pc:docMk/>
-          <pc:sldMk cId="321485736" sldId="286"/>
-        </pc:sldMkLst>
-        <pc:spChg chg="del">
-          <ac:chgData name="Sreejith Rajan" userId="ec11bca0e4bee75f" providerId="LiveId" clId="{7B4F392D-EAB3-4CE7-903E-F84869825F47}" dt="2025-09-19T08:02:53.103" v="1"/>
-          <ac:spMkLst>
-            <pc:docMk/>
-            <pc:sldMk cId="321485736" sldId="286"/>
-            <ac:spMk id="6" creationId="{740412F8-2E7C-D19E-3403-4E720E15525B}"/>
-          </ac:spMkLst>
-        </pc:spChg>
-      </pc:sldChg>
-      <pc:sldChg chg="modSp mod">
-        <pc:chgData name="Sreejith Rajan" userId="ec11bca0e4bee75f" providerId="LiveId" clId="{7B4F392D-EAB3-4CE7-903E-F84869825F47}" dt="2025-09-19T09:13:01.089" v="1066" actId="27636"/>
-        <pc:sldMkLst>
-          <pc:docMk/>
-          <pc:sldMk cId="3959199433" sldId="287"/>
-        </pc:sldMkLst>
-        <pc:spChg chg="mod">
-          <ac:chgData name="Sreejith Rajan" userId="ec11bca0e4bee75f" providerId="LiveId" clId="{7B4F392D-EAB3-4CE7-903E-F84869825F47}" dt="2025-09-19T09:01:25.079" v="902" actId="20577"/>
-          <ac:spMkLst>
-            <pc:docMk/>
-            <pc:sldMk cId="3959199433" sldId="287"/>
-            <ac:spMk id="54" creationId="{C4CE2FAD-1A13-21FB-4CDB-D7E0702E4157}"/>
-          </ac:spMkLst>
-        </pc:spChg>
-        <pc:spChg chg="mod">
-          <ac:chgData name="Sreejith Rajan" userId="ec11bca0e4bee75f" providerId="LiveId" clId="{7B4F392D-EAB3-4CE7-903E-F84869825F47}" dt="2025-09-19T09:13:01.089" v="1066" actId="27636"/>
-          <ac:spMkLst>
-            <pc:docMk/>
-            <pc:sldMk cId="3959199433" sldId="287"/>
-            <ac:spMk id="55" creationId="{FF1E4D12-E5A8-7B19-694A-8370FEB4E421}"/>
-          </ac:spMkLst>
-        </pc:spChg>
-      </pc:sldChg>
-      <pc:sldChg chg="del">
-        <pc:chgData name="Sreejith Rajan" userId="ec11bca0e4bee75f" providerId="LiveId" clId="{7B4F392D-EAB3-4CE7-903E-F84869825F47}" dt="2025-09-19T09:13:31.674" v="1068" actId="47"/>
-        <pc:sldMkLst>
-          <pc:docMk/>
-          <pc:sldMk cId="1933302962" sldId="288"/>
-        </pc:sldMkLst>
-      </pc:sldChg>
-      <pc:sldChg chg="del">
-        <pc:chgData name="Sreejith Rajan" userId="ec11bca0e4bee75f" providerId="LiveId" clId="{7B4F392D-EAB3-4CE7-903E-F84869825F47}" dt="2025-09-19T09:13:25.785" v="1067" actId="47"/>
-        <pc:sldMkLst>
-          <pc:docMk/>
-          <pc:sldMk cId="1380718396" sldId="289"/>
-        </pc:sldMkLst>
-      </pc:sldChg>
-      <pc:sldChg chg="addSp delSp modSp add mod">
-        <pc:chgData name="Sreejith Rajan" userId="ec11bca0e4bee75f" providerId="LiveId" clId="{7B4F392D-EAB3-4CE7-903E-F84869825F47}" dt="2025-09-19T09:11:44.869" v="1005" actId="1076"/>
-        <pc:sldMkLst>
-          <pc:docMk/>
-          <pc:sldMk cId="4163967858" sldId="290"/>
-        </pc:sldMkLst>
-        <pc:spChg chg="mod">
-          <ac:chgData name="Sreejith Rajan" userId="ec11bca0e4bee75f" providerId="LiveId" clId="{7B4F392D-EAB3-4CE7-903E-F84869825F47}" dt="2025-09-19T08:49:25.216" v="700" actId="164"/>
-          <ac:spMkLst>
-            <pc:docMk/>
-            <pc:sldMk cId="4163967858" sldId="290"/>
-            <ac:spMk id="6" creationId="{0E6B11D8-6D4A-063D-1223-156D055CD7BE}"/>
-          </ac:spMkLst>
-        </pc:spChg>
-        <pc:spChg chg="mod">
-          <ac:chgData name="Sreejith Rajan" userId="ec11bca0e4bee75f" providerId="LiveId" clId="{7B4F392D-EAB3-4CE7-903E-F84869825F47}" dt="2025-09-19T08:49:25.216" v="700" actId="164"/>
-          <ac:spMkLst>
-            <pc:docMk/>
-            <pc:sldMk cId="4163967858" sldId="290"/>
-            <ac:spMk id="7" creationId="{C7F6544E-63EE-4E11-CA6E-03443C0A8AB8}"/>
-          </ac:spMkLst>
-        </pc:spChg>
-        <pc:spChg chg="add mod">
-          <ac:chgData name="Sreejith Rajan" userId="ec11bca0e4bee75f" providerId="LiveId" clId="{7B4F392D-EAB3-4CE7-903E-F84869825F47}" dt="2025-09-19T08:49:25.216" v="700" actId="164"/>
-          <ac:spMkLst>
-            <pc:docMk/>
-            <pc:sldMk cId="4163967858" sldId="290"/>
-            <ac:spMk id="8" creationId="{F0AA1DDE-4E8C-A86B-CCA1-59212A405CAF}"/>
-          </ac:spMkLst>
-        </pc:spChg>
-        <pc:spChg chg="mod">
-          <ac:chgData name="Sreejith Rajan" userId="ec11bca0e4bee75f" providerId="LiveId" clId="{7B4F392D-EAB3-4CE7-903E-F84869825F47}" dt="2025-09-19T08:47:30.034" v="691" actId="20577"/>
-          <ac:spMkLst>
-            <pc:docMk/>
-            <pc:sldMk cId="4163967858" sldId="290"/>
-            <ac:spMk id="54" creationId="{3E528862-9120-2015-67B5-FE0308727BC9}"/>
-          </ac:spMkLst>
-        </pc:spChg>
-        <pc:grpChg chg="add mod">
-          <ac:chgData name="Sreejith Rajan" userId="ec11bca0e4bee75f" providerId="LiveId" clId="{7B4F392D-EAB3-4CE7-903E-F84869825F47}" dt="2025-09-19T09:11:44.869" v="1005" actId="1076"/>
-          <ac:grpSpMkLst>
-            <pc:docMk/>
-            <pc:sldMk cId="4163967858" sldId="290"/>
-            <ac:grpSpMk id="9" creationId="{FDA8E9B9-8031-5EBA-4FB9-532214F58CDC}"/>
-          </ac:grpSpMkLst>
-        </pc:grpChg>
-        <pc:picChg chg="del">
-          <ac:chgData name="Sreejith Rajan" userId="ec11bca0e4bee75f" providerId="LiveId" clId="{7B4F392D-EAB3-4CE7-903E-F84869825F47}" dt="2025-09-19T08:44:00.189" v="557" actId="478"/>
-          <ac:picMkLst>
-            <pc:docMk/>
-            <pc:sldMk cId="4163967858" sldId="290"/>
-            <ac:picMk id="3" creationId="{7DBDD101-26BF-4DBF-4418-ED696BBCD522}"/>
-          </ac:picMkLst>
-        </pc:picChg>
-        <pc:picChg chg="add mod">
-          <ac:chgData name="Sreejith Rajan" userId="ec11bca0e4bee75f" providerId="LiveId" clId="{7B4F392D-EAB3-4CE7-903E-F84869825F47}" dt="2025-09-19T08:49:25.216" v="700" actId="164"/>
-          <ac:picMkLst>
-            <pc:docMk/>
-            <pc:sldMk cId="4163967858" sldId="290"/>
-            <ac:picMk id="4" creationId="{CCB85055-4F9D-35BD-6809-B1EC0DA9CD69}"/>
-          </ac:picMkLst>
-        </pc:picChg>
-      </pc:sldChg>
-      <pc:sldChg chg="delSp modSp add mod">
-        <pc:chgData name="Sreejith Rajan" userId="ec11bca0e4bee75f" providerId="LiveId" clId="{7B4F392D-EAB3-4CE7-903E-F84869825F47}" dt="2025-09-19T09:27:32.680" v="1572" actId="20577"/>
-        <pc:sldMkLst>
-          <pc:docMk/>
-          <pc:sldMk cId="3054169711" sldId="291"/>
-        </pc:sldMkLst>
-        <pc:spChg chg="del">
-          <ac:chgData name="Sreejith Rajan" userId="ec11bca0e4bee75f" providerId="LiveId" clId="{7B4F392D-EAB3-4CE7-903E-F84869825F47}" dt="2025-09-19T08:52:22.744" v="725" actId="478"/>
-          <ac:spMkLst>
-            <pc:docMk/>
-            <pc:sldMk cId="3054169711" sldId="291"/>
-            <ac:spMk id="2" creationId="{0F6D8AFA-6FCE-0A66-73A7-85EFCC073495}"/>
-          </ac:spMkLst>
-        </pc:spChg>
-        <pc:spChg chg="mod">
-          <ac:chgData name="Sreejith Rajan" userId="ec11bca0e4bee75f" providerId="LiveId" clId="{7B4F392D-EAB3-4CE7-903E-F84869825F47}" dt="2025-09-19T09:27:32.680" v="1572" actId="20577"/>
-          <ac:spMkLst>
-            <pc:docMk/>
-            <pc:sldMk cId="3054169711" sldId="291"/>
-            <ac:spMk id="8" creationId="{843E001C-40B7-18BE-6C3D-5E9878FFAA10}"/>
-          </ac:spMkLst>
-        </pc:spChg>
-        <pc:spChg chg="mod">
-          <ac:chgData name="Sreejith Rajan" userId="ec11bca0e4bee75f" providerId="LiveId" clId="{7B4F392D-EAB3-4CE7-903E-F84869825F47}" dt="2025-09-19T08:50:59.499" v="724" actId="20577"/>
-          <ac:spMkLst>
-            <pc:docMk/>
-            <pc:sldMk cId="3054169711" sldId="291"/>
-            <ac:spMk id="54" creationId="{F79F0B4A-6313-A23F-5FB6-EB12E447B458}"/>
-          </ac:spMkLst>
-        </pc:spChg>
-      </pc:sldChg>
-      <pc:sldChg chg="addSp modSp add mod">
-        <pc:chgData name="Sreejith Rajan" userId="ec11bca0e4bee75f" providerId="LiveId" clId="{7B4F392D-EAB3-4CE7-903E-F84869825F47}" dt="2025-09-19T09:06:10.828" v="1002" actId="5793"/>
-        <pc:sldMkLst>
-          <pc:docMk/>
-          <pc:sldMk cId="1690133944" sldId="292"/>
-        </pc:sldMkLst>
-        <pc:spChg chg="add">
-          <ac:chgData name="Sreejith Rajan" userId="ec11bca0e4bee75f" providerId="LiveId" clId="{7B4F392D-EAB3-4CE7-903E-F84869825F47}" dt="2025-09-19T09:04:56.631" v="972"/>
-          <ac:spMkLst>
-            <pc:docMk/>
-            <pc:sldMk cId="1690133944" sldId="292"/>
-            <ac:spMk id="2" creationId="{D1CD4C31-6815-BB52-D8AE-36280BFE0FB7}"/>
-          </ac:spMkLst>
-        </pc:spChg>
-        <pc:spChg chg="mod">
-          <ac:chgData name="Sreejith Rajan" userId="ec11bca0e4bee75f" providerId="LiveId" clId="{7B4F392D-EAB3-4CE7-903E-F84869825F47}" dt="2025-09-19T09:04:40.348" v="970" actId="20577"/>
-          <ac:spMkLst>
-            <pc:docMk/>
-            <pc:sldMk cId="1690133944" sldId="292"/>
-            <ac:spMk id="54" creationId="{EDC9C741-9EF9-AD1A-B10B-C0F0FD0E5589}"/>
-          </ac:spMkLst>
-        </pc:spChg>
-        <pc:spChg chg="mod">
-          <ac:chgData name="Sreejith Rajan" userId="ec11bca0e4bee75f" providerId="LiveId" clId="{7B4F392D-EAB3-4CE7-903E-F84869825F47}" dt="2025-09-19T09:06:10.828" v="1002" actId="5793"/>
-          <ac:spMkLst>
-            <pc:docMk/>
-            <pc:sldMk cId="1690133944" sldId="292"/>
-            <ac:spMk id="55" creationId="{26607F08-7416-A9D7-E979-6607C70A9BA6}"/>
-          </ac:spMkLst>
-        </pc:spChg>
-      </pc:sldChg>
       <pc:sldChg chg="delSp modSp add mod ord">
-        <pc:chgData name="Sreejith Rajan" userId="ec11bca0e4bee75f" providerId="LiveId" clId="{7B4F392D-EAB3-4CE7-903E-F84869825F47}" dt="2025-09-19T09:19:34.400" v="1354" actId="20577"/>
+        <pc:chgData name="Sreejith Rajan" userId="ec11bca0e4bee75f" providerId="LiveId" clId="{7B4F392D-EAB3-4CE7-903E-F84869825F47}" dt="2025-11-27T15:12:57.160" v="1776" actId="20577"/>
         <pc:sldMkLst>
           <pc:docMk/>
           <pc:sldMk cId="1886088078" sldId="293"/>
         </pc:sldMkLst>
         <pc:spChg chg="mod">
-          <ac:chgData name="Sreejith Rajan" userId="ec11bca0e4bee75f" providerId="LiveId" clId="{7B4F392D-EAB3-4CE7-903E-F84869825F47}" dt="2025-09-19T09:15:39.192" v="1117" actId="20577"/>
-          <ac:spMkLst>
-            <pc:docMk/>
-            <pc:sldMk cId="1886088078" sldId="293"/>
-            <ac:spMk id="54" creationId="{9DF19AD3-EF11-9DCE-2D34-41B14C706DBA}"/>
-          </ac:spMkLst>
-        </pc:spChg>
-        <pc:spChg chg="mod">
-          <ac:chgData name="Sreejith Rajan" userId="ec11bca0e4bee75f" providerId="LiveId" clId="{7B4F392D-EAB3-4CE7-903E-F84869825F47}" dt="2025-09-19T09:19:34.400" v="1354" actId="20577"/>
+          <ac:chgData name="Sreejith Rajan" userId="ec11bca0e4bee75f" providerId="LiveId" clId="{7B4F392D-EAB3-4CE7-903E-F84869825F47}" dt="2025-11-27T15:12:57.160" v="1776" actId="20577"/>
           <ac:spMkLst>
             <pc:docMk/>
             <pc:sldMk cId="1886088078" sldId="293"/>
             <ac:spMk id="55" creationId="{BAEA60A2-6523-62E4-B4D3-4E0BF968E451}"/>
           </ac:spMkLst>
         </pc:spChg>
-        <pc:picChg chg="del">
-          <ac:chgData name="Sreejith Rajan" userId="ec11bca0e4bee75f" providerId="LiveId" clId="{7B4F392D-EAB3-4CE7-903E-F84869825F47}" dt="2025-09-19T09:15:43.993" v="1118" actId="478"/>
-          <ac:picMkLst>
-            <pc:docMk/>
-            <pc:sldMk cId="1886088078" sldId="293"/>
-            <ac:picMk id="6" creationId="{4DE4963D-6385-FB24-9949-51582665C759}"/>
-          </ac:picMkLst>
-        </pc:picChg>
-      </pc:sldChg>
-      <pc:sldChg chg="addSp delSp modSp add mod">
-        <pc:chgData name="Sreejith Rajan" userId="ec11bca0e4bee75f" providerId="LiveId" clId="{7B4F392D-EAB3-4CE7-903E-F84869825F47}" dt="2025-09-19T09:32:23.899" v="1768" actId="20577"/>
-        <pc:sldMkLst>
-          <pc:docMk/>
-          <pc:sldMk cId="812141662" sldId="294"/>
-        </pc:sldMkLst>
-        <pc:spChg chg="del">
-          <ac:chgData name="Sreejith Rajan" userId="ec11bca0e4bee75f" providerId="LiveId" clId="{7B4F392D-EAB3-4CE7-903E-F84869825F47}" dt="2025-09-19T09:29:56.664" v="1609" actId="478"/>
-          <ac:spMkLst>
-            <pc:docMk/>
-            <pc:sldMk cId="812141662" sldId="294"/>
-            <ac:spMk id="2" creationId="{4E46E8F6-A4FD-6EDC-7D65-A14849D89A12}"/>
-          </ac:spMkLst>
-        </pc:spChg>
-        <pc:spChg chg="add mod">
-          <ac:chgData name="Sreejith Rajan" userId="ec11bca0e4bee75f" providerId="LiveId" clId="{7B4F392D-EAB3-4CE7-903E-F84869825F47}" dt="2025-09-19T09:32:23.899" v="1768" actId="20577"/>
-          <ac:spMkLst>
-            <pc:docMk/>
-            <pc:sldMk cId="812141662" sldId="294"/>
-            <ac:spMk id="3" creationId="{0F921AD0-78C9-5D42-52BB-F418054F5EED}"/>
-          </ac:spMkLst>
-        </pc:spChg>
-        <pc:spChg chg="del mod">
-          <ac:chgData name="Sreejith Rajan" userId="ec11bca0e4bee75f" providerId="LiveId" clId="{7B4F392D-EAB3-4CE7-903E-F84869825F47}" dt="2025-09-19T09:29:50.704" v="1608" actId="478"/>
-          <ac:spMkLst>
-            <pc:docMk/>
-            <pc:sldMk cId="812141662" sldId="294"/>
-            <ac:spMk id="8" creationId="{1DB2485A-DB1B-2F55-64E8-B78400EA67FE}"/>
-          </ac:spMkLst>
-        </pc:spChg>
-        <pc:spChg chg="mod">
-          <ac:chgData name="Sreejith Rajan" userId="ec11bca0e4bee75f" providerId="LiveId" clId="{7B4F392D-EAB3-4CE7-903E-F84869825F47}" dt="2025-09-19T09:29:45.681" v="1606" actId="1076"/>
-          <ac:spMkLst>
-            <pc:docMk/>
-            <pc:sldMk cId="812141662" sldId="294"/>
-            <ac:spMk id="54" creationId="{070D4CEB-346F-EA4B-1F19-D30D94FFEBDE}"/>
-          </ac:spMkLst>
-        </pc:spChg>
-      </pc:sldChg>
-      <pc:sldChg chg="new del">
-        <pc:chgData name="Sreejith Rajan" userId="ec11bca0e4bee75f" providerId="LiveId" clId="{7B4F392D-EAB3-4CE7-903E-F84869825F47}" dt="2025-09-19T09:29:05.345" v="1574" actId="680"/>
-        <pc:sldMkLst>
-          <pc:docMk/>
-          <pc:sldMk cId="4185100054" sldId="294"/>
-        </pc:sldMkLst>
       </pc:sldChg>
     </pc:docChg>
   </pc:docChgLst>
@@ -7374,8 +6910,29 @@
                 <a:cs typeface="Helvetica Neue"/>
                 <a:sym typeface="Helvetica Neue"/>
               </a:rPr>
-              <a:t> as 64</a:t>
+              <a:t> </a:t>
             </a:r>
+            <a:r>
+              <a:rPr lang="en-IN" sz="2000">
+                <a:solidFill>
+                  <a:srgbClr val="FFFFFF"/>
+                </a:solidFill>
+                <a:latin typeface="Helvetica Neue"/>
+                <a:ea typeface="Helvetica Neue"/>
+                <a:cs typeface="Helvetica Neue"/>
+                <a:sym typeface="Helvetica Neue"/>
+              </a:rPr>
+              <a:t>as 1024</a:t>
+            </a:r>
+            <a:endParaRPr lang="en-IN" sz="2000" dirty="0">
+              <a:solidFill>
+                <a:srgbClr val="FFFFFF"/>
+              </a:solidFill>
+              <a:latin typeface="Helvetica Neue"/>
+              <a:ea typeface="Helvetica Neue"/>
+              <a:cs typeface="Helvetica Neue"/>
+              <a:sym typeface="Helvetica Neue"/>
+            </a:endParaRPr>
           </a:p>
           <a:p>
             <a:pPr marL="444500">
